--- a/5 - Model Free Control/old slides/Model-Free Control.pptx
+++ b/5 - Model Free Control/old slides/Model-Free Control.pptx
@@ -204,24 +204,6 @@
     <pc:chgData name="Joseph Marvin R. Imperial" userId="c5118018-74d5-4421-be4d-7197191e5b08" providerId="ADAL" clId="{70D03E3A-137A-44E5-9725-706554D6E372}"/>
     <pc:docChg chg="undo custSel addSld delSld modSld sldOrd">
       <pc:chgData name="Joseph Marvin R. Imperial" userId="c5118018-74d5-4421-be4d-7197191e5b08" providerId="ADAL" clId="{70D03E3A-137A-44E5-9725-706554D6E372}" dt="2021-04-10T13:20:12.491" v="1565" actId="47"/>
-      <pc:docMkLst>
-        <pc:docMk/>
-      </pc:docMkLst>
-    </pc:docChg>
-  </pc:docChgLst>
-  <pc:docChgLst>
-    <pc:chgData name="Joseph Marvin R. Imperial" userId="c5118018-74d5-4421-be4d-7197191e5b08" providerId="ADAL" clId="{AB9EEC7B-5938-AB4A-BBF1-2D08914B856E}"/>
-    <pc:docChg chg="addSld delSld">
-      <pc:chgData name="Joseph Marvin R. Imperial" userId="c5118018-74d5-4421-be4d-7197191e5b08" providerId="ADAL" clId="{AB9EEC7B-5938-AB4A-BBF1-2D08914B856E}" dt="2021-04-20T00:57:02.237" v="3" actId="2696"/>
-      <pc:docMkLst>
-        <pc:docMk/>
-      </pc:docMkLst>
-    </pc:docChg>
-  </pc:docChgLst>
-  <pc:docChgLst>
-    <pc:chgData name="Joseph Marvin R. Imperial" userId="c5118018-74d5-4421-be4d-7197191e5b08" providerId="ADAL" clId="{8B587F43-1B51-4416-B410-57F8B9E236B1}"/>
-    <pc:docChg chg="undo custSel addSld delSld modSld">
-      <pc:chgData name="Joseph Marvin R. Imperial" userId="c5118018-74d5-4421-be4d-7197191e5b08" providerId="ADAL" clId="{8B587F43-1B51-4416-B410-57F8B9E236B1}" dt="2021-03-24T12:30:06.351" v="559" actId="5793"/>
       <pc:docMkLst>
         <pc:docMk/>
       </pc:docMkLst>
@@ -747,6 +729,24 @@
     </pc:docChg>
   </pc:docChgLst>
   <pc:docChgLst>
+    <pc:chgData name="Joseph Marvin R. Imperial" userId="c5118018-74d5-4421-be4d-7197191e5b08" providerId="ADAL" clId="{8B587F43-1B51-4416-B410-57F8B9E236B1}"/>
+    <pc:docChg chg="undo custSel addSld delSld modSld">
+      <pc:chgData name="Joseph Marvin R. Imperial" userId="c5118018-74d5-4421-be4d-7197191e5b08" providerId="ADAL" clId="{8B587F43-1B51-4416-B410-57F8B9E236B1}" dt="2021-03-24T12:30:06.351" v="559" actId="5793"/>
+      <pc:docMkLst>
+        <pc:docMk/>
+      </pc:docMkLst>
+    </pc:docChg>
+  </pc:docChgLst>
+  <pc:docChgLst>
+    <pc:chgData name="Joseph Marvin R. Imperial" userId="c5118018-74d5-4421-be4d-7197191e5b08" providerId="ADAL" clId="{AB9EEC7B-5938-AB4A-BBF1-2D08914B856E}"/>
+    <pc:docChg chg="addSld delSld">
+      <pc:chgData name="Joseph Marvin R. Imperial" userId="c5118018-74d5-4421-be4d-7197191e5b08" providerId="ADAL" clId="{AB9EEC7B-5938-AB4A-BBF1-2D08914B856E}" dt="2021-04-20T00:57:02.237" v="3" actId="2696"/>
+      <pc:docMkLst>
+        <pc:docMk/>
+      </pc:docMkLst>
+    </pc:docChg>
+  </pc:docChgLst>
+  <pc:docChgLst>
     <pc:chgData name="Joseph Marvin R. Imperial" userId="c5118018-74d5-4421-be4d-7197191e5b08" providerId="ADAL" clId="{ADAC384E-8ED7-4287-AEF6-F4B3D17184E0}"/>
     <pc:docChg chg="undo custSel addSld delSld modSld sldOrd">
       <pc:chgData name="Joseph Marvin R. Imperial" userId="c5118018-74d5-4421-be4d-7197191e5b08" providerId="ADAL" clId="{ADAC384E-8ED7-4287-AEF6-F4B3D17184E0}" dt="2021-04-20T00:37:47.641" v="1593"/>
@@ -920,7 +920,7 @@
           <a:p>
             <a:fld id="{DCEEA480-FAED-44A7-B0CF-D7F3DF7642EB}" type="datetimeFigureOut">
               <a:rPr lang="en-PH" smtClean="0"/>
-              <a:t>9/17/25</a:t>
+              <a:t>18/09/2025</a:t>
             </a:fld>
             <a:endParaRPr lang="en-PH"/>
           </a:p>
@@ -1849,7 +1849,7 @@
           <a:p>
             <a:fld id="{E3F2C046-3488-4271-867B-6B64A28EF1DF}" type="datetimeFigureOut">
               <a:rPr lang="en-PH" smtClean="0"/>
-              <a:t>9/17/25</a:t>
+              <a:t>18/09/2025</a:t>
             </a:fld>
             <a:endParaRPr lang="en-PH"/>
           </a:p>
@@ -2049,7 +2049,7 @@
           <a:p>
             <a:fld id="{E3F2C046-3488-4271-867B-6B64A28EF1DF}" type="datetimeFigureOut">
               <a:rPr lang="en-PH" smtClean="0"/>
-              <a:t>9/17/25</a:t>
+              <a:t>18/09/2025</a:t>
             </a:fld>
             <a:endParaRPr lang="en-PH"/>
           </a:p>
@@ -2259,7 +2259,7 @@
           <a:p>
             <a:fld id="{E3F2C046-3488-4271-867B-6B64A28EF1DF}" type="datetimeFigureOut">
               <a:rPr lang="en-PH" smtClean="0"/>
-              <a:t>9/17/25</a:t>
+              <a:t>18/09/2025</a:t>
             </a:fld>
             <a:endParaRPr lang="en-PH"/>
           </a:p>
@@ -2519,7 +2519,7 @@
           <a:p>
             <a:fld id="{E3F2C046-3488-4271-867B-6B64A28EF1DF}" type="datetimeFigureOut">
               <a:rPr lang="en-PH" smtClean="0"/>
-              <a:t>9/17/25</a:t>
+              <a:t>18/09/2025</a:t>
             </a:fld>
             <a:endParaRPr lang="en-PH"/>
           </a:p>
@@ -2719,7 +2719,7 @@
           <a:p>
             <a:fld id="{E3F2C046-3488-4271-867B-6B64A28EF1DF}" type="datetimeFigureOut">
               <a:rPr lang="en-PH" smtClean="0"/>
-              <a:t>9/17/25</a:t>
+              <a:t>18/09/2025</a:t>
             </a:fld>
             <a:endParaRPr lang="en-PH"/>
           </a:p>
@@ -2995,7 +2995,7 @@
           <a:p>
             <a:fld id="{E3F2C046-3488-4271-867B-6B64A28EF1DF}" type="datetimeFigureOut">
               <a:rPr lang="en-PH" smtClean="0"/>
-              <a:t>9/17/25</a:t>
+              <a:t>18/09/2025</a:t>
             </a:fld>
             <a:endParaRPr lang="en-PH"/>
           </a:p>
@@ -3263,7 +3263,7 @@
           <a:p>
             <a:fld id="{E3F2C046-3488-4271-867B-6B64A28EF1DF}" type="datetimeFigureOut">
               <a:rPr lang="en-PH" smtClean="0"/>
-              <a:t>9/17/25</a:t>
+              <a:t>18/09/2025</a:t>
             </a:fld>
             <a:endParaRPr lang="en-PH"/>
           </a:p>
@@ -3678,7 +3678,7 @@
           <a:p>
             <a:fld id="{E3F2C046-3488-4271-867B-6B64A28EF1DF}" type="datetimeFigureOut">
               <a:rPr lang="en-PH" smtClean="0"/>
-              <a:t>9/17/25</a:t>
+              <a:t>18/09/2025</a:t>
             </a:fld>
             <a:endParaRPr lang="en-PH"/>
           </a:p>
@@ -3820,7 +3820,7 @@
           <a:p>
             <a:fld id="{E3F2C046-3488-4271-867B-6B64A28EF1DF}" type="datetimeFigureOut">
               <a:rPr lang="en-PH" smtClean="0"/>
-              <a:t>9/17/25</a:t>
+              <a:t>18/09/2025</a:t>
             </a:fld>
             <a:endParaRPr lang="en-PH"/>
           </a:p>
@@ -3933,7 +3933,7 @@
           <a:p>
             <a:fld id="{E3F2C046-3488-4271-867B-6B64A28EF1DF}" type="datetimeFigureOut">
               <a:rPr lang="en-PH" smtClean="0"/>
-              <a:t>9/17/25</a:t>
+              <a:t>18/09/2025</a:t>
             </a:fld>
             <a:endParaRPr lang="en-PH"/>
           </a:p>
@@ -4246,7 +4246,7 @@
           <a:p>
             <a:fld id="{E3F2C046-3488-4271-867B-6B64A28EF1DF}" type="datetimeFigureOut">
               <a:rPr lang="en-PH" smtClean="0"/>
-              <a:t>9/17/25</a:t>
+              <a:t>18/09/2025</a:t>
             </a:fld>
             <a:endParaRPr lang="en-PH"/>
           </a:p>
@@ -4535,7 +4535,7 @@
           <a:p>
             <a:fld id="{E3F2C046-3488-4271-867B-6B64A28EF1DF}" type="datetimeFigureOut">
               <a:rPr lang="en-PH" smtClean="0"/>
-              <a:t>9/17/25</a:t>
+              <a:t>18/09/2025</a:t>
             </a:fld>
             <a:endParaRPr lang="en-PH"/>
           </a:p>
@@ -4778,7 +4778,7 @@
           <a:p>
             <a:fld id="{E3F2C046-3488-4271-867B-6B64A28EF1DF}" type="datetimeFigureOut">
               <a:rPr lang="en-PH" smtClean="0"/>
-              <a:t>9/17/25</a:t>
+              <a:t>18/09/2025</a:t>
             </a:fld>
             <a:endParaRPr lang="en-PH"/>
           </a:p>
@@ -25544,8 +25544,8 @@
           </a:p>
         </p:txBody>
       </p:sp>
-      <mc:AlternateContent xmlns:mc="http://schemas.openxmlformats.org/markup-compatibility/2006">
-        <mc:Choice xmlns:a14="http://schemas.microsoft.com/office/drawing/2010/main" Requires="a14">
+      <mc:AlternateContent xmlns:mc="http://schemas.openxmlformats.org/markup-compatibility/2006" xmlns:a14="http://schemas.microsoft.com/office/drawing/2010/main">
+        <mc:Choice Requires="a14">
           <p:sp>
             <p:nvSpPr>
               <p:cNvPr id="3" name="TextBox 2">
@@ -25599,7 +25599,7 @@
             </p:txBody>
           </p:sp>
         </mc:Choice>
-        <mc:Fallback>
+        <mc:Fallback xmlns="">
           <p:sp>
             <p:nvSpPr>
               <p:cNvPr id="3" name="TextBox 2">
@@ -29808,8 +29808,8 @@
           </a:prstGeom>
         </p:spPr>
       </p:pic>
-      <mc:AlternateContent xmlns:mc="http://schemas.openxmlformats.org/markup-compatibility/2006">
-        <mc:Choice xmlns:a14="http://schemas.microsoft.com/office/drawing/2010/main" Requires="a14">
+      <mc:AlternateContent xmlns:mc="http://schemas.openxmlformats.org/markup-compatibility/2006" xmlns:a14="http://schemas.microsoft.com/office/drawing/2010/main">
+        <mc:Choice Requires="a14">
           <p:sp>
             <p:nvSpPr>
               <p:cNvPr id="4" name="TextBox 3">
@@ -30058,7 +30058,7 @@
             </p:txBody>
           </p:sp>
         </mc:Choice>
-        <mc:Fallback>
+        <mc:Fallback xmlns="">
           <p:sp>
             <p:nvSpPr>
               <p:cNvPr id="4" name="TextBox 3">
@@ -31980,12 +31980,68 @@
 </file>
 
 <file path=customXml/item1.xml><?xml version="1.0" encoding="utf-8"?>
+<?mso-contentType ?>
+<FormTemplates xmlns="http://schemas.microsoft.com/sharepoint/v3/contenttype/forms">
+  <Display>DocumentLibraryForm</Display>
+  <Edit>DocumentLibraryForm</Edit>
+  <New>DocumentLibraryForm</New>
+</FormTemplates>
+</file>
+
+<file path=customXml/item10.xml><?xml version="1.0" encoding="utf-8"?>
+<p:properties xmlns:p="http://schemas.microsoft.com/office/2006/metadata/properties" xmlns:xsi="http://www.w3.org/2001/XMLSchema-instance" xmlns:pc="http://schemas.microsoft.com/office/infopath/2007/PartnerControls">
+  <documentManagement>
+    <TaxCatchAll xmlns="8635a931-6b84-420a-938b-bf6e93596a85" xsi:nil="true"/>
+    <lcf76f155ced4ddcb4097134ff3c332f xmlns="83665817-2bf1-470e-9d34-a1cdf51135fc">
+      <Terms xmlns="http://schemas.microsoft.com/office/infopath/2007/PartnerControls"/>
+    </lcf76f155ced4ddcb4097134ff3c332f>
+  </documentManagement>
+</p:properties>
+</file>
+
+<file path=customXml/item11.xml><?xml version="1.0" encoding="utf-8"?>
 <Control xmlns="http://schemas.microsoft.com/VisualStudio/2011/storyboarding/control">
   <Id Name="8ace2fdb-12ac-4077-a484-31b1b60ebf69" Revision="1" Stencil="System.MyShapes" StencilVersion="1.0"/>
 </Control>
 </file>
 
-<file path=customXml/item10.xml><?xml version="1.0" encoding="utf-8"?>
+<file path=customXml/item2.xml><?xml version="1.0" encoding="utf-8"?>
+<Control xmlns="http://schemas.microsoft.com/VisualStudio/2011/storyboarding/control">
+  <Id Name="8ace2fdb-12ac-4077-a484-31b1b60ebf69" Revision="1" Stencil="System.MyShapes" StencilVersion="1.0"/>
+</Control>
+</file>
+
+<file path=customXml/item3.xml><?xml version="1.0" encoding="utf-8"?>
+<Control xmlns="http://schemas.microsoft.com/VisualStudio/2011/storyboarding/control">
+  <Id Name="8ace2fdb-12ac-4077-a484-31b1b60ebf69" Revision="1" Stencil="System.MyShapes" StencilVersion="1.0"/>
+</Control>
+</file>
+
+<file path=customXml/item4.xml><?xml version="1.0" encoding="utf-8"?>
+<Control xmlns="http://schemas.microsoft.com/VisualStudio/2011/storyboarding/control">
+  <Id Name="8ace2fdb-12ac-4077-a484-31b1b60ebf69" Revision="1" Stencil="System.MyShapes" StencilVersion="1.0"/>
+</Control>
+</file>
+
+<file path=customXml/item5.xml><?xml version="1.0" encoding="utf-8"?>
+<Control xmlns="http://schemas.microsoft.com/VisualStudio/2011/storyboarding/control">
+  <Id Name="8ace2fdb-12ac-4077-a484-31b1b60ebf69" Revision="1" Stencil="System.MyShapes" StencilVersion="1.0"/>
+</Control>
+</file>
+
+<file path=customXml/item6.xml><?xml version="1.0" encoding="utf-8"?>
+<Control xmlns="http://schemas.microsoft.com/VisualStudio/2011/storyboarding/control">
+  <Id Name="8ace2fdb-12ac-4077-a484-31b1b60ebf69" Revision="1" Stencil="System.MyShapes" StencilVersion="1.0"/>
+</Control>
+</file>
+
+<file path=customXml/item7.xml><?xml version="1.0" encoding="utf-8"?>
+<Control xmlns="http://schemas.microsoft.com/VisualStudio/2011/storyboarding/control">
+  <Id Name="8ace2fdb-12ac-4077-a484-31b1b60ebf69" Revision="1" Stencil="System.MyShapes" StencilVersion="1.0"/>
+</Control>
+</file>
+
+<file path=customXml/item8.xml><?xml version="1.0" encoding="utf-8"?>
 <ct:contentTypeSchema xmlns:ct="http://schemas.microsoft.com/office/2006/metadata/contentType" xmlns:ma="http://schemas.microsoft.com/office/2006/metadata/properties/metaAttributes" ct:_="" ma:_="" ma:contentTypeName="Document" ma:contentTypeID="0x010100A8972596D83CB9448D5CC5920EF207E5" ma:contentTypeVersion="15" ma:contentTypeDescription="Create a new document." ma:contentTypeScope="" ma:versionID="e0bf2008eb45d6d5fc139be6c8039e46">
   <xsd:schema xmlns:xsd="http://www.w3.org/2001/XMLSchema" xmlns:xs="http://www.w3.org/2001/XMLSchema" xmlns:p="http://schemas.microsoft.com/office/2006/metadata/properties" xmlns:ns2="83665817-2bf1-470e-9d34-a1cdf51135fc" xmlns:ns3="8635a931-6b84-420a-938b-bf6e93596a85" targetNamespace="http://schemas.microsoft.com/office/2006/metadata/properties" ma:root="true" ma:fieldsID="b3f89756f7e2a2b7ac115775bf8004ea" ns2:_="" ns3:_="">
     <xsd:import namespace="83665817-2bf1-470e-9d34-a1cdf51135fc"/>
@@ -32222,69 +32278,72 @@
 </ct:contentTypeSchema>
 </file>
 
-<file path=customXml/item11.xml><?xml version="1.0" encoding="utf-8"?>
+<file path=customXml/item9.xml><?xml version="1.0" encoding="utf-8"?>
 <Control xmlns="http://schemas.microsoft.com/VisualStudio/2011/storyboarding/control">
   <Id Name="8ace2fdb-12ac-4077-a484-31b1b60ebf69" Revision="1" Stencil="System.MyShapes" StencilVersion="1.0"/>
 </Control>
 </file>
 
-<file path=customXml/item2.xml><?xml version="1.0" encoding="utf-8"?>
-<?mso-contentType ?>
-<FormTemplates xmlns="http://schemas.microsoft.com/sharepoint/v3/contenttype/forms">
-  <Display>DocumentLibraryForm</Display>
-  <Edit>DocumentLibraryForm</Edit>
-  <New>DocumentLibraryForm</New>
-</FormTemplates>
+<file path=customXml/itemProps1.xml><?xml version="1.0" encoding="utf-8"?>
+<ds:datastoreItem xmlns:ds="http://schemas.openxmlformats.org/officeDocument/2006/customXml" ds:itemID="{F166DAC8-4ECC-4130-9B37-BEDCB54573DF}">
+  <ds:schemaRefs>
+    <ds:schemaRef ds:uri="http://schemas.microsoft.com/sharepoint/v3/contenttype/forms"/>
+  </ds:schemaRefs>
+</ds:datastoreItem>
 </file>
 
-<file path=customXml/item3.xml><?xml version="1.0" encoding="utf-8"?>
-<Control xmlns="http://schemas.microsoft.com/VisualStudio/2011/storyboarding/control">
-  <Id Name="8ace2fdb-12ac-4077-a484-31b1b60ebf69" Revision="1" Stencil="System.MyShapes" StencilVersion="1.0"/>
-</Control>
+<file path=customXml/itemProps10.xml><?xml version="1.0" encoding="utf-8"?>
+<ds:datastoreItem xmlns:ds="http://schemas.openxmlformats.org/officeDocument/2006/customXml" ds:itemID="{5999E179-E0BD-40A6-9179-FDE9AD04F1CC}">
+  <ds:schemaRefs>
+    <ds:schemaRef ds:uri="http://schemas.microsoft.com/office/2006/metadata/properties"/>
+    <ds:schemaRef ds:uri="http://schemas.microsoft.com/office/infopath/2007/PartnerControls"/>
+    <ds:schemaRef ds:uri="8635a931-6b84-420a-938b-bf6e93596a85"/>
+    <ds:schemaRef ds:uri="83665817-2bf1-470e-9d34-a1cdf51135fc"/>
+  </ds:schemaRefs>
+</ds:datastoreItem>
 </file>
 
-<file path=customXml/item4.xml><?xml version="1.0" encoding="utf-8"?>
-<Control xmlns="http://schemas.microsoft.com/VisualStudio/2011/storyboarding/control">
-  <Id Name="8ace2fdb-12ac-4077-a484-31b1b60ebf69" Revision="1" Stencil="System.MyShapes" StencilVersion="1.0"/>
-</Control>
+<file path=customXml/itemProps11.xml><?xml version="1.0" encoding="utf-8"?>
+<ds:datastoreItem xmlns:ds="http://schemas.openxmlformats.org/officeDocument/2006/customXml" ds:itemID="{DB215FA1-4FD3-42FD-A00D-2232EB3452BE}">
+  <ds:schemaRefs>
+    <ds:schemaRef ds:uri="http://schemas.microsoft.com/VisualStudio/2011/storyboarding/control"/>
+  </ds:schemaRefs>
+</ds:datastoreItem>
 </file>
 
-<file path=customXml/item5.xml><?xml version="1.0" encoding="utf-8"?>
-<Control xmlns="http://schemas.microsoft.com/VisualStudio/2011/storyboarding/control">
-  <Id Name="8ace2fdb-12ac-4077-a484-31b1b60ebf69" Revision="1" Stencil="System.MyShapes" StencilVersion="1.0"/>
-</Control>
+<file path=customXml/itemProps2.xml><?xml version="1.0" encoding="utf-8"?>
+<ds:datastoreItem xmlns:ds="http://schemas.openxmlformats.org/officeDocument/2006/customXml" ds:itemID="{11BDA43E-947F-4629-A7CA-0F1298F3BE36}">
+  <ds:schemaRefs>
+    <ds:schemaRef ds:uri="http://schemas.microsoft.com/VisualStudio/2011/storyboarding/control"/>
+  </ds:schemaRefs>
+</ds:datastoreItem>
 </file>
 
-<file path=customXml/item6.xml><?xml version="1.0" encoding="utf-8"?>
-<Control xmlns="http://schemas.microsoft.com/VisualStudio/2011/storyboarding/control">
-  <Id Name="8ace2fdb-12ac-4077-a484-31b1b60ebf69" Revision="1" Stencil="System.MyShapes" StencilVersion="1.0"/>
-</Control>
+<file path=customXml/itemProps3.xml><?xml version="1.0" encoding="utf-8"?>
+<ds:datastoreItem xmlns:ds="http://schemas.openxmlformats.org/officeDocument/2006/customXml" ds:itemID="{CAEBBB30-5DD1-4E52-82DE-A02E4733D29A}">
+  <ds:schemaRefs>
+    <ds:schemaRef ds:uri="http://schemas.microsoft.com/VisualStudio/2011/storyboarding/control"/>
+  </ds:schemaRefs>
+</ds:datastoreItem>
 </file>
 
-<file path=customXml/item7.xml><?xml version="1.0" encoding="utf-8"?>
-<Control xmlns="http://schemas.microsoft.com/VisualStudio/2011/storyboarding/control">
-  <Id Name="8ace2fdb-12ac-4077-a484-31b1b60ebf69" Revision="1" Stencil="System.MyShapes" StencilVersion="1.0"/>
-</Control>
+<file path=customXml/itemProps4.xml><?xml version="1.0" encoding="utf-8"?>
+<ds:datastoreItem xmlns:ds="http://schemas.openxmlformats.org/officeDocument/2006/customXml" ds:itemID="{C4D067AF-DC92-4F11-82F5-13007749D8F7}">
+  <ds:schemaRefs>
+    <ds:schemaRef ds:uri="http://schemas.microsoft.com/VisualStudio/2011/storyboarding/control"/>
+  </ds:schemaRefs>
+</ds:datastoreItem>
 </file>
 
-<file path=customXml/item8.xml><?xml version="1.0" encoding="utf-8"?>
-<Control xmlns="http://schemas.microsoft.com/VisualStudio/2011/storyboarding/control">
-  <Id Name="8ace2fdb-12ac-4077-a484-31b1b60ebf69" Revision="1" Stencil="System.MyShapes" StencilVersion="1.0"/>
-</Control>
+<file path=customXml/itemProps5.xml><?xml version="1.0" encoding="utf-8"?>
+<ds:datastoreItem xmlns:ds="http://schemas.openxmlformats.org/officeDocument/2006/customXml" ds:itemID="{C0AE690A-6DA2-4539-97E4-9CACEDAE07A0}">
+  <ds:schemaRefs>
+    <ds:schemaRef ds:uri="http://schemas.microsoft.com/VisualStudio/2011/storyboarding/control"/>
+  </ds:schemaRefs>
+</ds:datastoreItem>
 </file>
 
-<file path=customXml/item9.xml><?xml version="1.0" encoding="utf-8"?>
-<p:properties xmlns:p="http://schemas.microsoft.com/office/2006/metadata/properties" xmlns:xsi="http://www.w3.org/2001/XMLSchema-instance" xmlns:pc="http://schemas.microsoft.com/office/infopath/2007/PartnerControls">
-  <documentManagement>
-    <TaxCatchAll xmlns="8635a931-6b84-420a-938b-bf6e93596a85" xsi:nil="true"/>
-    <lcf76f155ced4ddcb4097134ff3c332f xmlns="83665817-2bf1-470e-9d34-a1cdf51135fc">
-      <Terms xmlns="http://schemas.microsoft.com/office/infopath/2007/PartnerControls"/>
-    </lcf76f155ced4ddcb4097134ff3c332f>
-  </documentManagement>
-</p:properties>
-</file>
-
-<file path=customXml/itemProps1.xml><?xml version="1.0" encoding="utf-8"?>
+<file path=customXml/itemProps6.xml><?xml version="1.0" encoding="utf-8"?>
 <ds:datastoreItem xmlns:ds="http://schemas.openxmlformats.org/officeDocument/2006/customXml" ds:itemID="{AD4724DF-B3D7-4FCF-AA8F-856D3FC7F828}">
   <ds:schemaRefs>
     <ds:schemaRef ds:uri="http://schemas.microsoft.com/VisualStudio/2011/storyboarding/control"/>
@@ -32292,7 +32351,15 @@
 </ds:datastoreItem>
 </file>
 
-<file path=customXml/itemProps10.xml><?xml version="1.0" encoding="utf-8"?>
+<file path=customXml/itemProps7.xml><?xml version="1.0" encoding="utf-8"?>
+<ds:datastoreItem xmlns:ds="http://schemas.openxmlformats.org/officeDocument/2006/customXml" ds:itemID="{F79BED0A-E20E-4F16-91D3-BB18BCF17AE7}">
+  <ds:schemaRefs>
+    <ds:schemaRef ds:uri="http://schemas.microsoft.com/VisualStudio/2011/storyboarding/control"/>
+  </ds:schemaRefs>
+</ds:datastoreItem>
+</file>
+
+<file path=customXml/itemProps8.xml><?xml version="1.0" encoding="utf-8"?>
 <ds:datastoreItem xmlns:ds="http://schemas.openxmlformats.org/officeDocument/2006/customXml" ds:itemID="{BB604A8B-05E3-451E-8C75-68576FF9640A}">
   <ds:schemaRefs>
     <ds:schemaRef ds:uri="http://schemas.microsoft.com/office/2006/metadata/contentType"/>
@@ -32311,77 +32378,10 @@
 </ds:datastoreItem>
 </file>
 
-<file path=customXml/itemProps11.xml><?xml version="1.0" encoding="utf-8"?>
-<ds:datastoreItem xmlns:ds="http://schemas.openxmlformats.org/officeDocument/2006/customXml" ds:itemID="{11BDA43E-947F-4629-A7CA-0F1298F3BE36}">
-  <ds:schemaRefs>
-    <ds:schemaRef ds:uri="http://schemas.microsoft.com/VisualStudio/2011/storyboarding/control"/>
-  </ds:schemaRefs>
-</ds:datastoreItem>
-</file>
-
-<file path=customXml/itemProps2.xml><?xml version="1.0" encoding="utf-8"?>
-<ds:datastoreItem xmlns:ds="http://schemas.openxmlformats.org/officeDocument/2006/customXml" ds:itemID="{F166DAC8-4ECC-4130-9B37-BEDCB54573DF}">
-  <ds:schemaRefs>
-    <ds:schemaRef ds:uri="http://schemas.microsoft.com/sharepoint/v3/contenttype/forms"/>
-  </ds:schemaRefs>
-</ds:datastoreItem>
-</file>
-
-<file path=customXml/itemProps3.xml><?xml version="1.0" encoding="utf-8"?>
-<ds:datastoreItem xmlns:ds="http://schemas.openxmlformats.org/officeDocument/2006/customXml" ds:itemID="{C0AE690A-6DA2-4539-97E4-9CACEDAE07A0}">
-  <ds:schemaRefs>
-    <ds:schemaRef ds:uri="http://schemas.microsoft.com/VisualStudio/2011/storyboarding/control"/>
-  </ds:schemaRefs>
-</ds:datastoreItem>
-</file>
-
-<file path=customXml/itemProps4.xml><?xml version="1.0" encoding="utf-8"?>
+<file path=customXml/itemProps9.xml><?xml version="1.0" encoding="utf-8"?>
 <ds:datastoreItem xmlns:ds="http://schemas.openxmlformats.org/officeDocument/2006/customXml" ds:itemID="{1E432C16-7313-413A-AE06-D8B8B05337A0}">
   <ds:schemaRefs>
     <ds:schemaRef ds:uri="http://schemas.microsoft.com/VisualStudio/2011/storyboarding/control"/>
   </ds:schemaRefs>
 </ds:datastoreItem>
-</file>
-
-<file path=customXml/itemProps5.xml><?xml version="1.0" encoding="utf-8"?>
-<ds:datastoreItem xmlns:ds="http://schemas.openxmlformats.org/officeDocument/2006/customXml" ds:itemID="{CAEBBB30-5DD1-4E52-82DE-A02E4733D29A}">
-  <ds:schemaRefs>
-    <ds:schemaRef ds:uri="http://schemas.microsoft.com/VisualStudio/2011/storyboarding/control"/>
-  </ds:schemaRefs>
-</ds:datastoreItem>
-</file>
-
-<file path=customXml/itemProps6.xml><?xml version="1.0" encoding="utf-8"?>
-<ds:datastoreItem xmlns:ds="http://schemas.openxmlformats.org/officeDocument/2006/customXml" ds:itemID="{F79BED0A-E20E-4F16-91D3-BB18BCF17AE7}">
-  <ds:schemaRefs>
-    <ds:schemaRef ds:uri="http://schemas.microsoft.com/VisualStudio/2011/storyboarding/control"/>
-  </ds:schemaRefs>
-</ds:datastoreItem>
-</file>
-
-<file path=customXml/itemProps7.xml><?xml version="1.0" encoding="utf-8"?>
-<ds:datastoreItem xmlns:ds="http://schemas.openxmlformats.org/officeDocument/2006/customXml" ds:itemID="{DB215FA1-4FD3-42FD-A00D-2232EB3452BE}">
-  <ds:schemaRefs>
-    <ds:schemaRef ds:uri="http://schemas.microsoft.com/VisualStudio/2011/storyboarding/control"/>
-  </ds:schemaRefs>
-</ds:datastoreItem>
-</file>
-
-<file path=customXml/itemProps8.xml><?xml version="1.0" encoding="utf-8"?>
-<ds:datastoreItem xmlns:ds="http://schemas.openxmlformats.org/officeDocument/2006/customXml" ds:itemID="{C4D067AF-DC92-4F11-82F5-13007749D8F7}">
-  <ds:schemaRefs>
-    <ds:schemaRef ds:uri="http://schemas.microsoft.com/VisualStudio/2011/storyboarding/control"/>
-  </ds:schemaRefs>
-</ds:datastoreItem>
-</file>
-
-<file path=customXml/itemProps9.xml><?xml version="1.0" encoding="utf-8"?>
-<ds:datastoreItem xmlns:ds="http://schemas.openxmlformats.org/officeDocument/2006/customXml" ds:itemID="{5999E179-E0BD-40A6-9179-FDE9AD04F1CC}">
-  <ds:schemaRefs>
-    <ds:schemaRef ds:uri="http://schemas.microsoft.com/office/2006/metadata/properties"/>
-    <ds:schemaRef ds:uri="http://schemas.microsoft.com/office/infopath/2007/PartnerControls"/>
-    <ds:schemaRef ds:uri="8635a931-6b84-420a-938b-bf6e93596a85"/>
-    <ds:schemaRef ds:uri="83665817-2bf1-470e-9d34-a1cdf51135fc"/>
-  </ds:schemaRefs>
-</ds:datastoreItem>
 </file>